--- a/templates/prime.pptx
+++ b/templates/prime.pptx
@@ -350,7 +350,7 @@
             <a:fld id="{1D8BD707-D9CF-40AE-B4C6-C98DA3205C09}" type="datetimeFigureOut">
               <a:rPr lang="en-US" smtClean="0"/>
               <a:pPr/>
-              <a:t>6/23/2026</a:t>
+              <a:t>6/26/2026</a:t>
             </a:fld>
             <a:endParaRPr lang="en-US"/>
           </a:p>
@@ -515,7 +515,7 @@
             <a:fld id="{1D8BD707-D9CF-40AE-B4C6-C98DA3205C09}" type="datetimeFigureOut">
               <a:rPr lang="en-US" smtClean="0"/>
               <a:pPr/>
-              <a:t>6/23/2026</a:t>
+              <a:t>6/26/2026</a:t>
             </a:fld>
             <a:endParaRPr lang="en-US"/>
           </a:p>
@@ -690,7 +690,7 @@
             <a:fld id="{1D8BD707-D9CF-40AE-B4C6-C98DA3205C09}" type="datetimeFigureOut">
               <a:rPr lang="en-US" smtClean="0"/>
               <a:pPr/>
-              <a:t>6/23/2026</a:t>
+              <a:t>6/26/2026</a:t>
             </a:fld>
             <a:endParaRPr lang="en-US"/>
           </a:p>
@@ -855,7 +855,7 @@
             <a:fld id="{1D8BD707-D9CF-40AE-B4C6-C98DA3205C09}" type="datetimeFigureOut">
               <a:rPr lang="en-US" smtClean="0"/>
               <a:pPr/>
-              <a:t>6/23/2026</a:t>
+              <a:t>6/26/2026</a:t>
             </a:fld>
             <a:endParaRPr lang="en-US"/>
           </a:p>
@@ -1097,7 +1097,7 @@
             <a:fld id="{1D8BD707-D9CF-40AE-B4C6-C98DA3205C09}" type="datetimeFigureOut">
               <a:rPr lang="en-US" smtClean="0"/>
               <a:pPr/>
-              <a:t>6/23/2026</a:t>
+              <a:t>6/26/2026</a:t>
             </a:fld>
             <a:endParaRPr lang="en-US"/>
           </a:p>
@@ -1379,7 +1379,7 @@
             <a:fld id="{1D8BD707-D9CF-40AE-B4C6-C98DA3205C09}" type="datetimeFigureOut">
               <a:rPr lang="en-US" smtClean="0"/>
               <a:pPr/>
-              <a:t>6/23/2026</a:t>
+              <a:t>6/26/2026</a:t>
             </a:fld>
             <a:endParaRPr lang="en-US"/>
           </a:p>
@@ -1795,7 +1795,7 @@
             <a:fld id="{1D8BD707-D9CF-40AE-B4C6-C98DA3205C09}" type="datetimeFigureOut">
               <a:rPr lang="en-US" smtClean="0"/>
               <a:pPr/>
-              <a:t>6/23/2026</a:t>
+              <a:t>6/26/2026</a:t>
             </a:fld>
             <a:endParaRPr lang="en-US"/>
           </a:p>
@@ -1909,7 +1909,7 @@
             <a:fld id="{1D8BD707-D9CF-40AE-B4C6-C98DA3205C09}" type="datetimeFigureOut">
               <a:rPr lang="en-US" smtClean="0"/>
               <a:pPr/>
-              <a:t>6/23/2026</a:t>
+              <a:t>6/26/2026</a:t>
             </a:fld>
             <a:endParaRPr lang="en-US"/>
           </a:p>
@@ -2001,7 +2001,7 @@
             <a:fld id="{1D8BD707-D9CF-40AE-B4C6-C98DA3205C09}" type="datetimeFigureOut">
               <a:rPr lang="en-US" smtClean="0"/>
               <a:pPr/>
-              <a:t>6/23/2026</a:t>
+              <a:t>6/26/2026</a:t>
             </a:fld>
             <a:endParaRPr lang="en-US"/>
           </a:p>
@@ -2273,7 +2273,7 @@
             <a:fld id="{1D8BD707-D9CF-40AE-B4C6-C98DA3205C09}" type="datetimeFigureOut">
               <a:rPr lang="en-US" smtClean="0"/>
               <a:pPr/>
-              <a:t>6/23/2026</a:t>
+              <a:t>6/26/2026</a:t>
             </a:fld>
             <a:endParaRPr lang="en-US"/>
           </a:p>
@@ -2522,7 +2522,7 @@
             <a:fld id="{1D8BD707-D9CF-40AE-B4C6-C98DA3205C09}" type="datetimeFigureOut">
               <a:rPr lang="en-US" smtClean="0"/>
               <a:pPr/>
-              <a:t>6/23/2026</a:t>
+              <a:t>6/26/2026</a:t>
             </a:fld>
             <a:endParaRPr lang="en-US"/>
           </a:p>
@@ -2730,7 +2730,7 @@
             <a:fld id="{1D8BD707-D9CF-40AE-B4C6-C98DA3205C09}" type="datetimeFigureOut">
               <a:rPr lang="en-US" smtClean="0"/>
               <a:pPr/>
-              <a:t>6/23/2026</a:t>
+              <a:t>6/26/2026</a:t>
             </a:fld>
             <a:endParaRPr lang="en-US"/>
           </a:p>
@@ -3349,8 +3349,8 @@
         </p:nvSpPr>
         <p:spPr>
           <a:xfrm>
-            <a:off x="2897064" y="5525788"/>
-            <a:ext cx="4345068" cy="573746"/>
+            <a:off x="2897064" y="5523074"/>
+            <a:ext cx="4345068" cy="534826"/>
           </a:xfrm>
           <a:prstGeom prst="rect">
             <a:avLst/>
@@ -3368,7 +3368,7 @@
               </a:lnSpc>
             </a:pPr>
             <a:r>
-              <a:rPr lang="en-US" sz="3330" b="1" dirty="0">
+              <a:rPr lang="en-US" sz="2500" b="1" dirty="0">
                 <a:solidFill>
                   <a:srgbClr val="000000"/>
                 </a:solidFill>
@@ -11450,7 +11450,7 @@
               </a:lnSpc>
             </a:pPr>
             <a:r>
-              <a:rPr lang="en-US" sz="3000" b="1" dirty="0">
+              <a:rPr lang="en-US" sz="2500" b="1" dirty="0">
                 <a:solidFill>
                   <a:srgbClr val="FFFFFF"/>
                 </a:solidFill>
@@ -11743,7 +11743,7 @@
                 <a:cs typeface="Open Sans Bold Italics"/>
                 <a:sym typeface="Open Sans Bold Italics"/>
               </a:rPr>
-              <a:t>: 60 meses.</a:t>
+              <a:t>: [PRAZO]</a:t>
             </a:r>
           </a:p>
           <a:p>
